--- a/2.0mil_ample.pptx
+++ b/2.0mil_ample.pptx
@@ -4505,7 +4505,7 @@
                           <a:ea typeface="Calibri" pitchFamily="34" charset="-122"/>
                           <a:cs typeface="Calibri" pitchFamily="34" charset="-120"/>
                         </a:rPr>
-                        <a:t>85%</a:t>
+                        <a:t>82%</a:t>
                       </a:r>
                       <a:endParaRPr lang="en-US" sz="750" dirty="0">
                         <a:latin typeface="Calibri" charset="0"/>
@@ -13314,7 +13314,7 @@
         </p:nvSpPr>
         <p:spPr>
           <a:xfrm>
-            <a:off x="502920" y="2565801"/>
+            <a:off x="502920" y="2563127"/>
             <a:ext cx="8138160" cy="10973"/>
           </a:xfrm>
           <a:prstGeom prst="rect">
@@ -13339,8 +13339,8 @@
         </p:nvSpPr>
         <p:spPr>
           <a:xfrm>
-            <a:off x="539090" y="2565801"/>
-            <a:ext cx="153721" cy="975777"/>
+            <a:off x="539090" y="2563127"/>
+            <a:ext cx="153721" cy="977223"/>
           </a:xfrm>
           <a:prstGeom prst="rect">
             <a:avLst/>
@@ -13364,8 +13364,8 @@
         </p:nvSpPr>
         <p:spPr>
           <a:xfrm>
-            <a:off x="765150" y="2565801"/>
-            <a:ext cx="153721" cy="975777"/>
+            <a:off x="765150" y="2563127"/>
+            <a:ext cx="153721" cy="977223"/>
           </a:xfrm>
           <a:prstGeom prst="rect">
             <a:avLst/>
@@ -13389,8 +13389,8 @@
         </p:nvSpPr>
         <p:spPr>
           <a:xfrm>
-            <a:off x="991210" y="2565801"/>
-            <a:ext cx="153721" cy="975777"/>
+            <a:off x="991210" y="2563127"/>
+            <a:ext cx="153721" cy="977223"/>
           </a:xfrm>
           <a:prstGeom prst="rect">
             <a:avLst/>
@@ -13414,8 +13414,8 @@
         </p:nvSpPr>
         <p:spPr>
           <a:xfrm>
-            <a:off x="1217270" y="2565801"/>
-            <a:ext cx="153721" cy="975777"/>
+            <a:off x="1217270" y="2563127"/>
+            <a:ext cx="153721" cy="977223"/>
           </a:xfrm>
           <a:prstGeom prst="rect">
             <a:avLst/>
@@ -13439,8 +13439,8 @@
         </p:nvSpPr>
         <p:spPr>
           <a:xfrm>
-            <a:off x="1443330" y="2565801"/>
-            <a:ext cx="153721" cy="975777"/>
+            <a:off x="1443330" y="2563127"/>
+            <a:ext cx="153721" cy="977223"/>
           </a:xfrm>
           <a:prstGeom prst="rect">
             <a:avLst/>
@@ -13464,8 +13464,8 @@
         </p:nvSpPr>
         <p:spPr>
           <a:xfrm>
-            <a:off x="1669390" y="2565801"/>
-            <a:ext cx="153721" cy="975777"/>
+            <a:off x="1669390" y="2563127"/>
+            <a:ext cx="153721" cy="977223"/>
           </a:xfrm>
           <a:prstGeom prst="rect">
             <a:avLst/>
@@ -13528,8 +13528,8 @@
         </p:nvSpPr>
         <p:spPr>
           <a:xfrm>
-            <a:off x="1895450" y="2565801"/>
-            <a:ext cx="153721" cy="1384407"/>
+            <a:off x="1895450" y="2563127"/>
+            <a:ext cx="153721" cy="1387081"/>
           </a:xfrm>
           <a:prstGeom prst="rect">
             <a:avLst/>
@@ -13553,8 +13553,8 @@
         </p:nvSpPr>
         <p:spPr>
           <a:xfrm>
-            <a:off x="2121510" y="2565801"/>
-            <a:ext cx="153721" cy="1119746"/>
+            <a:off x="2121510" y="2563127"/>
+            <a:ext cx="153721" cy="1122313"/>
           </a:xfrm>
           <a:prstGeom prst="rect">
             <a:avLst/>
@@ -13578,8 +13578,8 @@
         </p:nvSpPr>
         <p:spPr>
           <a:xfrm>
-            <a:off x="2347570" y="2565801"/>
-            <a:ext cx="153721" cy="817262"/>
+            <a:off x="2347570" y="2563127"/>
+            <a:ext cx="153721" cy="819716"/>
           </a:xfrm>
           <a:prstGeom prst="rect">
             <a:avLst/>
@@ -13603,8 +13603,8 @@
         </p:nvSpPr>
         <p:spPr>
           <a:xfrm>
-            <a:off x="2573630" y="2565801"/>
-            <a:ext cx="153721" cy="590403"/>
+            <a:off x="2573630" y="2563127"/>
+            <a:ext cx="153721" cy="592778"/>
           </a:xfrm>
           <a:prstGeom prst="rect">
             <a:avLst/>
@@ -13628,8 +13628,8 @@
         </p:nvSpPr>
         <p:spPr>
           <a:xfrm>
-            <a:off x="2799690" y="2565801"/>
-            <a:ext cx="153721" cy="363545"/>
+            <a:off x="2799690" y="2563127"/>
+            <a:ext cx="153721" cy="365831"/>
           </a:xfrm>
           <a:prstGeom prst="rect">
             <a:avLst/>
@@ -13653,8 +13653,8 @@
         </p:nvSpPr>
         <p:spPr>
           <a:xfrm>
-            <a:off x="3025750" y="2565801"/>
-            <a:ext cx="153721" cy="136696"/>
+            <a:off x="3025750" y="2563127"/>
+            <a:ext cx="153721" cy="138883"/>
           </a:xfrm>
           <a:prstGeom prst="rect">
             <a:avLst/>
@@ -13717,8 +13717,8 @@
         </p:nvSpPr>
         <p:spPr>
           <a:xfrm>
-            <a:off x="3251810" y="2475639"/>
-            <a:ext cx="153721" cy="90162"/>
+            <a:off x="3251810" y="2475062"/>
+            <a:ext cx="153721" cy="88065"/>
           </a:xfrm>
           <a:prstGeom prst="rect">
             <a:avLst/>
@@ -13742,8 +13742,8 @@
         </p:nvSpPr>
         <p:spPr>
           <a:xfrm>
-            <a:off x="3477870" y="2324396"/>
-            <a:ext cx="153721" cy="241404"/>
+            <a:off x="3477870" y="2323773"/>
+            <a:ext cx="153721" cy="239354"/>
           </a:xfrm>
           <a:prstGeom prst="rect">
             <a:avLst/>
@@ -13767,8 +13767,8 @@
         </p:nvSpPr>
         <p:spPr>
           <a:xfrm>
-            <a:off x="3703930" y="2173154"/>
-            <a:ext cx="153721" cy="392646"/>
+            <a:off x="3703930" y="2172475"/>
+            <a:ext cx="153721" cy="390652"/>
           </a:xfrm>
           <a:prstGeom prst="rect">
             <a:avLst/>
@@ -13792,8 +13792,8 @@
         </p:nvSpPr>
         <p:spPr>
           <a:xfrm>
-            <a:off x="3929990" y="2021922"/>
-            <a:ext cx="153721" cy="543879"/>
+            <a:off x="3929990" y="2021176"/>
+            <a:ext cx="153721" cy="541951"/>
           </a:xfrm>
           <a:prstGeom prst="rect">
             <a:avLst/>
@@ -13817,8 +13817,8 @@
         </p:nvSpPr>
         <p:spPr>
           <a:xfrm>
-            <a:off x="4156050" y="1870680"/>
-            <a:ext cx="153721" cy="695121"/>
+            <a:off x="4156050" y="1869878"/>
+            <a:ext cx="153721" cy="693249"/>
           </a:xfrm>
           <a:prstGeom prst="rect">
             <a:avLst/>
@@ -13842,8 +13842,8 @@
         </p:nvSpPr>
         <p:spPr>
           <a:xfrm>
-            <a:off x="4382110" y="1840889"/>
-            <a:ext cx="153721" cy="724912"/>
+            <a:off x="4382110" y="1840171"/>
+            <a:ext cx="153721" cy="722956"/>
           </a:xfrm>
           <a:prstGeom prst="rect">
             <a:avLst/>
@@ -13906,8 +13906,8 @@
         </p:nvSpPr>
         <p:spPr>
           <a:xfrm>
-            <a:off x="4608170" y="1811097"/>
-            <a:ext cx="153721" cy="754703"/>
+            <a:off x="4608170" y="1810454"/>
+            <a:ext cx="153721" cy="752673"/>
           </a:xfrm>
           <a:prstGeom prst="rect">
             <a:avLst/>
@@ -13931,8 +13931,8 @@
         </p:nvSpPr>
         <p:spPr>
           <a:xfrm>
-            <a:off x="4834230" y="1781306"/>
-            <a:ext cx="153721" cy="784494"/>
+            <a:off x="4834230" y="1780747"/>
+            <a:ext cx="153721" cy="782380"/>
           </a:xfrm>
           <a:prstGeom prst="rect">
             <a:avLst/>
@@ -13956,8 +13956,8 @@
         </p:nvSpPr>
         <p:spPr>
           <a:xfrm>
-            <a:off x="5060290" y="1751515"/>
-            <a:ext cx="153721" cy="814285"/>
+            <a:off x="5060290" y="1751040"/>
+            <a:ext cx="153721" cy="812087"/>
           </a:xfrm>
           <a:prstGeom prst="rect">
             <a:avLst/>
@@ -13981,8 +13981,8 @@
         </p:nvSpPr>
         <p:spPr>
           <a:xfrm>
-            <a:off x="5286350" y="1721724"/>
-            <a:ext cx="153721" cy="844077"/>
+            <a:off x="5286350" y="1721323"/>
+            <a:ext cx="153721" cy="841804"/>
           </a:xfrm>
           <a:prstGeom prst="rect">
             <a:avLst/>
@@ -14006,8 +14006,8 @@
         </p:nvSpPr>
         <p:spPr>
           <a:xfrm>
-            <a:off x="5512410" y="1701866"/>
-            <a:ext cx="153721" cy="863934"/>
+            <a:off x="5512410" y="1701515"/>
+            <a:ext cx="153721" cy="861612"/>
           </a:xfrm>
           <a:prstGeom prst="rect">
             <a:avLst/>
@@ -14031,8 +14031,8 @@
         </p:nvSpPr>
         <p:spPr>
           <a:xfrm>
-            <a:off x="5738470" y="1682009"/>
-            <a:ext cx="153721" cy="883792"/>
+            <a:off x="5738470" y="1681717"/>
+            <a:ext cx="153721" cy="881410"/>
           </a:xfrm>
           <a:prstGeom prst="rect">
             <a:avLst/>
@@ -14095,8 +14095,8 @@
         </p:nvSpPr>
         <p:spPr>
           <a:xfrm>
-            <a:off x="5964530" y="1662142"/>
-            <a:ext cx="153721" cy="903659"/>
+            <a:off x="5964530" y="1661909"/>
+            <a:ext cx="153721" cy="901218"/>
           </a:xfrm>
           <a:prstGeom prst="rect">
             <a:avLst/>
@@ -14120,8 +14120,8 @@
         </p:nvSpPr>
         <p:spPr>
           <a:xfrm>
-            <a:off x="6190590" y="1642284"/>
-            <a:ext cx="153721" cy="923516"/>
+            <a:off x="6190590" y="1642101"/>
+            <a:ext cx="153721" cy="921026"/>
           </a:xfrm>
           <a:prstGeom prst="rect">
             <a:avLst/>
@@ -14145,8 +14145,8 @@
         </p:nvSpPr>
         <p:spPr>
           <a:xfrm>
-            <a:off x="6416650" y="1632350"/>
-            <a:ext cx="153721" cy="933450"/>
+            <a:off x="6416650" y="1632192"/>
+            <a:ext cx="153721" cy="930935"/>
           </a:xfrm>
           <a:prstGeom prst="rect">
             <a:avLst/>
@@ -14170,8 +14170,8 @@
         </p:nvSpPr>
         <p:spPr>
           <a:xfrm>
-            <a:off x="6642710" y="1612493"/>
-            <a:ext cx="153721" cy="953308"/>
+            <a:off x="6642710" y="1612384"/>
+            <a:ext cx="153721" cy="950743"/>
           </a:xfrm>
           <a:prstGeom prst="rect">
             <a:avLst/>
@@ -14195,8 +14195,8 @@
         </p:nvSpPr>
         <p:spPr>
           <a:xfrm>
-            <a:off x="6868770" y="1602559"/>
-            <a:ext cx="153721" cy="963241"/>
+            <a:off x="6868770" y="1602485"/>
+            <a:ext cx="153721" cy="960642"/>
           </a:xfrm>
           <a:prstGeom prst="rect">
             <a:avLst/>
@@ -14220,8 +14220,8 @@
         </p:nvSpPr>
         <p:spPr>
           <a:xfrm>
-            <a:off x="7094830" y="1592635"/>
-            <a:ext cx="153721" cy="973165"/>
+            <a:off x="7094830" y="1592576"/>
+            <a:ext cx="153721" cy="970551"/>
           </a:xfrm>
           <a:prstGeom prst="rect">
             <a:avLst/>
@@ -14284,8 +14284,8 @@
         </p:nvSpPr>
         <p:spPr>
           <a:xfrm>
-            <a:off x="7320890" y="1582702"/>
-            <a:ext cx="153721" cy="983099"/>
+            <a:off x="7320890" y="1582677"/>
+            <a:ext cx="153721" cy="980450"/>
           </a:xfrm>
           <a:prstGeom prst="rect">
             <a:avLst/>
@@ -14310,7 +14310,7 @@
         <p:spPr>
           <a:xfrm>
             <a:off x="7546950" y="1572768"/>
-            <a:ext cx="153721" cy="993033"/>
+            <a:ext cx="153721" cy="990359"/>
           </a:xfrm>
           <a:prstGeom prst="rect">
             <a:avLst/>
@@ -14335,7 +14335,7 @@
         <p:spPr>
           <a:xfrm>
             <a:off x="7773010" y="1572768"/>
-            <a:ext cx="153721" cy="993033"/>
+            <a:ext cx="153721" cy="990359"/>
           </a:xfrm>
           <a:prstGeom prst="rect">
             <a:avLst/>
@@ -14360,7 +14360,7 @@
         <p:spPr>
           <a:xfrm>
             <a:off x="7999070" y="1572768"/>
-            <a:ext cx="153721" cy="993033"/>
+            <a:ext cx="153721" cy="990359"/>
           </a:xfrm>
           <a:prstGeom prst="rect">
             <a:avLst/>
@@ -14385,7 +14385,7 @@
         <p:spPr>
           <a:xfrm>
             <a:off x="8225130" y="1572768"/>
-            <a:ext cx="153721" cy="993033"/>
+            <a:ext cx="153721" cy="990359"/>
           </a:xfrm>
           <a:prstGeom prst="rect">
             <a:avLst/>
@@ -14410,7 +14410,7 @@
         <p:spPr>
           <a:xfrm>
             <a:off x="8451190" y="1572768"/>
-            <a:ext cx="153721" cy="993033"/>
+            <a:ext cx="153721" cy="990359"/>
           </a:xfrm>
           <a:prstGeom prst="rect">
             <a:avLst/>
@@ -14498,7 +14498,7 @@
                 <a:ea typeface="Calibri" pitchFamily="34" charset="-122"/>
                 <a:cs typeface="Calibri" pitchFamily="34" charset="-120"/>
               </a:rPr>
-              <a:t>$100,766 / mo</a:t>
+              <a:t>$100,346 / mo</a:t>
             </a:r>
             <a:endParaRPr lang="en-US" sz="700" dirty="0"/>
           </a:p>
@@ -14537,7 +14537,7 @@
                 <a:ea typeface="Calibri" pitchFamily="34" charset="-122"/>
                 <a:cs typeface="Calibri" pitchFamily="34" charset="-120"/>
               </a:rPr>
-              <a:t>$-140,480 / mo</a:t>
+              <a:t>$-140,543 / mo</a:t>
             </a:r>
             <a:endParaRPr lang="en-US" sz="700" dirty="0"/>
           </a:p>
@@ -14576,7 +14576,7 @@
                 <a:ea typeface="Calibri" pitchFamily="34" charset="-122"/>
                 <a:cs typeface="Calibri" pitchFamily="34" charset="-120"/>
               </a:rPr>
-              <a:t>Cash trough -$730,146 at month 13, against a $958,000 working capital and debt service reserve funded inside use of funds.</a:t>
+              <a:t>Cash trough -$731,184 at month 13, against a $1,146,000 working capital and debt service reserve funded inside use of funds.</a:t>
             </a:r>
             <a:endParaRPr lang="en-US" sz="950" dirty="0"/>
           </a:p>
@@ -15295,7 +15295,7 @@
                           <a:ea typeface="Calibri" pitchFamily="34" charset="-122"/>
                           <a:cs typeface="Calibri" pitchFamily="34" charset="-120"/>
                         </a:rPr>
-                        <a:t>-$114,751</a:t>
+                        <a:t>-$115,171</a:t>
                       </a:r>
                       <a:endParaRPr lang="en-US" sz="800" dirty="0">
                         <a:latin typeface="Calibri" charset="0"/>
@@ -15707,7 +15707,7 @@
                           <a:ea typeface="Calibri" pitchFamily="34" charset="-122"/>
                           <a:cs typeface="Calibri" pitchFamily="34" charset="-120"/>
                         </a:rPr>
-                        <a:t>$383,666</a:t>
+                        <a:t>$383,246</a:t>
                       </a:r>
                       <a:endParaRPr lang="en-US" sz="800" dirty="0">
                         <a:latin typeface="Calibri" charset="0"/>
@@ -17767,7 +17767,7 @@
                           <a:ea typeface="Calibri" pitchFamily="34" charset="-122"/>
                           <a:cs typeface="Calibri" pitchFamily="34" charset="-120"/>
                         </a:rPr>
-                        <a:t>$100,766</a:t>
+                        <a:t>$100,346</a:t>
                       </a:r>
                       <a:endParaRPr lang="en-US" sz="800" dirty="0">
                         <a:latin typeface="Calibri" charset="0"/>
@@ -18418,7 +18418,7 @@
                 <a:ea typeface="Calibri" pitchFamily="34" charset="-122"/>
                 <a:cs typeface="Calibri" pitchFamily="34" charset="-120"/>
               </a:rPr>
-              <a:t>$276,239</a:t>
+              <a:t>$275,937</a:t>
             </a:r>
             <a:endParaRPr lang="en-US" sz="900" dirty="0"/>
           </a:p>
@@ -18496,7 +18496,7 @@
                 <a:ea typeface="Calibri" pitchFamily="34" charset="-122"/>
                 <a:cs typeface="Calibri" pitchFamily="34" charset="-120"/>
               </a:rPr>
-              <a:t>$-6,661</a:t>
+              <a:t>$-6,963</a:t>
             </a:r>
             <a:endParaRPr lang="en-US" sz="900" dirty="0"/>
           </a:p>
@@ -18574,7 +18574,7 @@
                 <a:ea typeface="Calibri" pitchFamily="34" charset="-122"/>
                 <a:cs typeface="Calibri" pitchFamily="34" charset="-120"/>
               </a:rPr>
-              <a:t>-0.15x</a:t>
+              <a:t>-0.16x</a:t>
             </a:r>
             <a:endParaRPr lang="en-US" sz="900" dirty="0"/>
           </a:p>
@@ -18679,7 +18679,7 @@
                 <a:ea typeface="Century Gothic" pitchFamily="34" charset="-122"/>
                 <a:cs typeface="Century Gothic" pitchFamily="34" charset="-120"/>
               </a:rPr>
-              <a:t>$1.21M / yr</a:t>
+              <a:t>$1.20M / yr</a:t>
             </a:r>
             <a:endParaRPr lang="en-US" sz="1800" dirty="0"/>
           </a:p>
@@ -18877,7 +18877,7 @@
                 <a:ea typeface="Calibri" pitchFamily="34" charset="-122"/>
                 <a:cs typeface="Calibri" pitchFamily="34" charset="-120"/>
               </a:rPr>
-              <a:t>$383,666</a:t>
+              <a:t>$383,246</a:t>
             </a:r>
             <a:endParaRPr lang="en-US" sz="900" dirty="0"/>
           </a:p>
@@ -18955,7 +18955,7 @@
                 <a:ea typeface="Calibri" pitchFamily="34" charset="-122"/>
                 <a:cs typeface="Calibri" pitchFamily="34" charset="-120"/>
               </a:rPr>
-              <a:t>$100,766</a:t>
+              <a:t>$100,346</a:t>
             </a:r>
             <a:endParaRPr lang="en-US" sz="900" dirty="0"/>
           </a:p>
@@ -19033,7 +19033,7 @@
                 <a:ea typeface="Calibri" pitchFamily="34" charset="-122"/>
                 <a:cs typeface="Calibri" pitchFamily="34" charset="-120"/>
               </a:rPr>
-              <a:t>2.34x</a:t>
+              <a:t>2.33x</a:t>
             </a:r>
             <a:endParaRPr lang="en-US" sz="900" dirty="0"/>
           </a:p>
@@ -19138,7 +19138,7 @@
                 <a:ea typeface="Century Gothic" pitchFamily="34" charset="-122"/>
                 <a:cs typeface="Century Gothic" pitchFamily="34" charset="-120"/>
               </a:rPr>
-              <a:t>$2.50M / yr</a:t>
+              <a:t>$2.49M / yr</a:t>
             </a:r>
             <a:endParaRPr lang="en-US" sz="1800" dirty="0"/>
           </a:p>
@@ -19336,7 +19336,7 @@
                 <a:ea typeface="Calibri" pitchFamily="34" charset="-122"/>
                 <a:cs typeface="Calibri" pitchFamily="34" charset="-120"/>
               </a:rPr>
-              <a:t>$491,092</a:t>
+              <a:t>$490,554</a:t>
             </a:r>
             <a:endParaRPr lang="en-US" sz="900" dirty="0"/>
           </a:p>
@@ -19414,7 +19414,7 @@
                 <a:ea typeface="Calibri" pitchFamily="34" charset="-122"/>
                 <a:cs typeface="Calibri" pitchFamily="34" charset="-120"/>
               </a:rPr>
-              <a:t>$208,192</a:t>
+              <a:t>$207,654</a:t>
             </a:r>
             <a:endParaRPr lang="en-US" sz="900" dirty="0"/>
           </a:p>
@@ -19492,7 +19492,7 @@
                 <a:ea typeface="Calibri" pitchFamily="34" charset="-122"/>
                 <a:cs typeface="Calibri" pitchFamily="34" charset="-120"/>
               </a:rPr>
-              <a:t>4.84x</a:t>
+              <a:t>4.83x</a:t>
             </a:r>
             <a:endParaRPr lang="en-US" sz="900" dirty="0"/>
           </a:p>
@@ -20139,7 +20139,7 @@
                 <a:ea typeface="Calibri" pitchFamily="34" charset="-122"/>
                 <a:cs typeface="Calibri" pitchFamily="34" charset="-120"/>
               </a:rPr>
-              <a:t>Project cost is unchanged. The private raise replaces the minimum equity injection, so the SBA 7(a) loan shrinks to fill the rest. Less debt against the same operating income is what lifts stabilized coverage to 2.34x.</a:t>
+              <a:t>Project cost is unchanged. The private raise replaces the minimum equity injection, so the SBA 7(a) loan shrinks to fill the rest. Less debt against the same operating income is what lifts stabilized coverage to 2.33x.</a:t>
             </a:r>
             <a:endParaRPr lang="en-US" sz="900" dirty="0"/>
           </a:p>
@@ -20369,7 +20369,7 @@
                 <a:ea typeface="Calibri" pitchFamily="34" charset="-122"/>
                 <a:cs typeface="Calibri" pitchFamily="34" charset="-120"/>
               </a:rPr>
-              <a:t>The working capital and debt service reserve is sized against the modeled cash trough of $730,146 at month 13, not to a round number.</a:t>
+              <a:t>The working capital and debt service reserve is sized against the modeled cash trough of $731,184 at month 13, not to a round number.</a:t>
             </a:r>
             <a:endParaRPr lang="en-US" sz="1150" dirty="0"/>
           </a:p>
@@ -21244,7 +21244,7 @@
                           <a:ea typeface="Calibri" pitchFamily="34" charset="-122"/>
                           <a:cs typeface="Calibri" pitchFamily="34" charset="-120"/>
                         </a:rPr>
-                        <a:t>Recovery technology: HBOT, Ammortal, Aescape</a:t>
+                        <a:t>Recovery technology: HBOT purchased, Ammortal deposit</a:t>
                       </a:r>
                       <a:endParaRPr lang="en-US" sz="850" dirty="0">
                         <a:latin typeface="Calibri" charset="0"/>
@@ -21312,7 +21312,7 @@
                           <a:ea typeface="Calibri" pitchFamily="34" charset="-122"/>
                           <a:cs typeface="Calibri" pitchFamily="34" charset="-120"/>
                         </a:rPr>
-                        <a:t>$370,000</a:t>
+                        <a:t>$182,000</a:t>
                       </a:r>
                       <a:endParaRPr lang="en-US" sz="850" dirty="0">
                         <a:latin typeface="Calibri" charset="0"/>
@@ -21380,7 +21380,7 @@
                           <a:ea typeface="Calibri" pitchFamily="34" charset="-122"/>
                           <a:cs typeface="Calibri" pitchFamily="34" charset="-120"/>
                         </a:rPr>
-                        <a:t>7%</a:t>
+                        <a:t>4%</a:t>
                       </a:r>
                       <a:endParaRPr lang="en-US" sz="850" dirty="0">
                         <a:latin typeface="Calibri" charset="0"/>
@@ -22136,7 +22136,7 @@
                           <a:ea typeface="Calibri" pitchFamily="34" charset="-122"/>
                           <a:cs typeface="Calibri" pitchFamily="34" charset="-120"/>
                         </a:rPr>
-                        <a:t>$958,000</a:t>
+                        <a:t>$1,146,000</a:t>
                       </a:r>
                       <a:endParaRPr lang="en-US" sz="850" dirty="0">
                         <a:latin typeface="Calibri" charset="0"/>
@@ -22204,7 +22204,7 @@
                           <a:ea typeface="Calibri" pitchFamily="34" charset="-122"/>
                           <a:cs typeface="Calibri" pitchFamily="34" charset="-120"/>
                         </a:rPr>
-                        <a:t>19%</a:t>
+                        <a:t>23%</a:t>
                       </a:r>
                       <a:endParaRPr lang="en-US" sz="850" dirty="0">
                         <a:latin typeface="Calibri" charset="0"/>
@@ -24008,7 +24008,7 @@
                           <a:ea typeface="Calibri" pitchFamily="34" charset="-122"/>
                           <a:cs typeface="Calibri" pitchFamily="34" charset="-120"/>
                         </a:rPr>
-                        <a:t>$958,000</a:t>
+                        <a:t>$1,146,000</a:t>
                       </a:r>
                       <a:endParaRPr lang="en-US" sz="950" dirty="0">
                         <a:latin typeface="Calibri" charset="0"/>
@@ -24452,7 +24452,7 @@
                           <a:ea typeface="Calibri" pitchFamily="34" charset="-122"/>
                           <a:cs typeface="Calibri" pitchFamily="34" charset="-120"/>
                         </a:rPr>
-                        <a:t>-$1,041,795</a:t>
+                        <a:t>-$1,042,606</a:t>
                       </a:r>
                       <a:endParaRPr lang="en-US" sz="950" dirty="0">
                         <a:latin typeface="Calibri" charset="0"/>
@@ -24588,7 +24588,7 @@
                           <a:ea typeface="Calibri" pitchFamily="34" charset="-122"/>
                           <a:cs typeface="Calibri" pitchFamily="34" charset="-120"/>
                         </a:rPr>
-                        <a:t>-4.87x</a:t>
+                        <a:t>-4.88x</a:t>
                       </a:r>
                       <a:endParaRPr lang="en-US" sz="950" dirty="0">
                         <a:latin typeface="Calibri" charset="0"/>
@@ -24726,7 +24726,7 @@
                           <a:ea typeface="Calibri" pitchFamily="34" charset="-122"/>
                           <a:cs typeface="Calibri" pitchFamily="34" charset="-120"/>
                         </a:rPr>
-                        <a:t>$774,585</a:t>
+                        <a:t>$770,884</a:t>
                       </a:r>
                       <a:endParaRPr lang="en-US" sz="950" dirty="0">
                         <a:latin typeface="Calibri" charset="0"/>
@@ -25000,7 +25000,7 @@
                           <a:ea typeface="Calibri" pitchFamily="34" charset="-122"/>
                           <a:cs typeface="Calibri" pitchFamily="34" charset="-120"/>
                         </a:rPr>
-                        <a:t>$1,176,945</a:t>
+                        <a:t>$1,172,038</a:t>
                       </a:r>
                       <a:endParaRPr lang="en-US" sz="950" dirty="0">
                         <a:latin typeface="Calibri" charset="0"/>
@@ -25136,7 +25136,7 @@
                           <a:ea typeface="Calibri" pitchFamily="34" charset="-122"/>
                           <a:cs typeface="Calibri" pitchFamily="34" charset="-120"/>
                         </a:rPr>
-                        <a:t>2.28x</a:t>
+                        <a:t>2.27x</a:t>
                       </a:r>
                       <a:endParaRPr lang="en-US" sz="950" dirty="0">
                         <a:latin typeface="Calibri" charset="0"/>
@@ -25274,7 +25274,7 @@
                           <a:ea typeface="Calibri" pitchFamily="34" charset="-122"/>
                           <a:cs typeface="Calibri" pitchFamily="34" charset="-120"/>
                         </a:rPr>
-                        <a:t>$1,209,186</a:t>
+                        <a:t>$1,204,146</a:t>
                       </a:r>
                       <a:endParaRPr lang="en-US" sz="950" dirty="0">
                         <a:latin typeface="Calibri" charset="0"/>
@@ -25410,7 +25410,7 @@
                           <a:ea typeface="Calibri" pitchFamily="34" charset="-122"/>
                           <a:cs typeface="Calibri" pitchFamily="34" charset="-120"/>
                         </a:rPr>
-                        <a:t>2.34x</a:t>
+                        <a:t>2.33x</a:t>
                       </a:r>
                       <a:endParaRPr lang="en-US" sz="950" dirty="0">
                         <a:latin typeface="Calibri" charset="0"/>
@@ -25499,7 +25499,7 @@
                 <a:ea typeface="Calibri" pitchFamily="34" charset="-122"/>
                 <a:cs typeface="Calibri" pitchFamily="34" charset="-120"/>
               </a:rPr>
-              <a:t>Rate sensitivity: 2.34x at 9.5%   ·   2.26x at 10.5%   ·   2.18x at 11.5%</a:t>
+              <a:t>Rate sensitivity: 2.33x at 9.5%   ·   2.25x at 10.5%   ·   2.17x at 11.5%</a:t>
             </a:r>
             <a:endParaRPr lang="en-US" sz="900" dirty="0"/>
           </a:p>
@@ -25772,7 +25772,7 @@
                 <a:ea typeface="Calibri" pitchFamily="34" charset="-122"/>
                 <a:cs typeface="Calibri" pitchFamily="34" charset="-120"/>
               </a:rPr>
-              <a:t>Year 1 operating income is negative. Six of those months are construction and the rest are the opening ramp. Debt service is interest-only for the first 18 months, and the $958,000 reserve inside use of funds is sized against a modeled cash trough of $730,146 at month 13.</a:t>
+              <a:t>Year 1 operating income is negative. Six of those months are construction and the rest are the opening ramp. Debt service is interest-only for the first 18 months, and the $1,146,000 reserve inside use of funds is sized against a modeled cash trough of $731,184 at month 13.</a:t>
             </a:r>
             <a:endParaRPr lang="en-US" sz="1050" dirty="0"/>
           </a:p>
@@ -25814,7 +25814,7 @@
                 <a:ea typeface="Calibri" pitchFamily="34" charset="-122"/>
                 <a:cs typeface="Calibri" pitchFamily="34" charset="-120"/>
               </a:rPr>
-              <a:t>Rate sensitivity: stabilized coverage runs 2.34x at 9.5%, 2.26x at 10.5%, 2.18x at 11.5%. Coverage holds above 1.25x even 200 basis points above the assumed rate.</a:t>
+              <a:t>Rate sensitivity: stabilized coverage runs 2.33x at 9.5%, 2.25x at 10.5%, 2.17x at 11.5%. Coverage holds above 1.25x even 200 basis points above the assumed rate.</a:t>
             </a:r>
             <a:endParaRPr lang="en-US" sz="1050" dirty="0"/>
           </a:p>
@@ -30612,7 +30612,7 @@
                 <a:ea typeface="Calibri" pitchFamily="34" charset="-122"/>
                 <a:cs typeface="Calibri" pitchFamily="34" charset="-120"/>
               </a:rPr>
-              <a:t>Ample · $2.0M private case  ·  $5.0M project  ·  5,800 SF  ·  2.34x stabilized coverage</a:t>
+              <a:t>Ample · $2.0M private case  ·  $5.0M project  ·  5,800 SF  ·  2.33x stabilized coverage</a:t>
             </a:r>
             <a:endParaRPr lang="en-US" sz="1150" dirty="0"/>
           </a:p>
